--- a/segmentation/segmentation.pptx
+++ b/segmentation/segmentation.pptx
@@ -492,7 +492,7 @@
                   <a:schemeClr val="bg1"/>
                 </a:solidFill>
               </a:rPr>
-              <a:t>September 27, 2026</a:t>
+              <a:t>October 22, 2026</a:t>
             </a:r>
             <a:endParaRPr lang="en-US" sz="1100"/>
           </a:p>
@@ -884,7 +884,7 @@
                   <a:schemeClr val="bg1"/>
                 </a:solidFill>
               </a:rPr>
-              <a:t>September 27, 2026</a:t>
+              <a:t>October 22, 2026</a:t>
             </a:r>
             <a:endParaRPr lang="en-US" sz="1100"/>
           </a:p>
@@ -1372,7 +1372,7 @@
                   <a:schemeClr val="bg1"/>
                 </a:solidFill>
               </a:rPr>
-              <a:t>September 27, 2026</a:t>
+              <a:t>October 22, 2026</a:t>
             </a:r>
             <a:endParaRPr lang="en-US" sz="1100"/>
           </a:p>
@@ -1960,7 +1960,7 @@
             </a:pPr>
             <a:r>
               <a:rPr/>
-              <a:t>September 27, 2026</a:t>
+              <a:t>October 22, 2026</a:t>
             </a:r>
           </a:p>
         </p:txBody>
@@ -3327,8 +3327,8 @@
         </p:nvSpPr>
         <p:spPr>
           <a:xfrm>
-            <a:off x="773942" y="1721324"/>
-            <a:ext cx="4055432" cy="4055432"/>
+            <a:off x="639834" y="2016362"/>
+            <a:ext cx="3465356" cy="3465356"/>
           </a:xfrm>
           <a:prstGeom prst="rect">
             <a:avLst/>
@@ -3394,8 +3394,8 @@
             </p:nvSpPr>
             <p:spPr>
               <a:xfrm>
-                <a:off x="5420435" y="2209292"/>
-                <a:ext cx="6222620" cy="470408"/>
+                <a:off x="4562143" y="2296576"/>
+                <a:ext cx="7080912" cy="470408"/>
               </a:xfrm>
               <a:prstGeom prst="rect">
                 <a:avLst/>
@@ -3665,8 +3665,8 @@
             </p:nvSpPr>
             <p:spPr>
               <a:xfrm>
-                <a:off x="5420435" y="2209292"/>
-                <a:ext cx="6222620" cy="470408"/>
+                <a:off x="4562143" y="2296576"/>
+                <a:ext cx="7080912" cy="470408"/>
               </a:xfrm>
               <a:prstGeom prst="rect">
                 <a:avLst/>
@@ -3908,8 +3908,8 @@
             </p:nvSpPr>
             <p:spPr>
               <a:xfrm>
-                <a:off x="5420435" y="2908300"/>
-                <a:ext cx="6222620" cy="960120"/>
+                <a:off x="4562143" y="2995584"/>
+                <a:ext cx="7080912" cy="785553"/>
               </a:xfrm>
               <a:prstGeom prst="rect">
                 <a:avLst/>
@@ -3930,7 +3930,7 @@
                     </m:oMathParaPr>
                     <m:oMath>
                       <m:r>
-                        <a:rPr lang="en-US" sz="2310" i="1">
+                        <a:rPr lang="en-US" sz="1890" i="1">
                           <a:latin typeface="Cambria Math"/>
                         </a:rPr>
                         <m:t>E</m:t>
@@ -3939,7 +3939,7 @@
                         <m:rPr>
                           <m:sty m:val="p"/>
                         </m:rPr>
-                        <a:rPr lang="en-US" sz="2310" i="0">
+                        <a:rPr lang="en-US" sz="1890" i="0">
                           <a:latin typeface="Cambria Math"/>
                         </a:rPr>
                         <m:t>=</m:t>
@@ -3953,7 +3953,7 @@
                         </m:naryPr>
                         <m:sub>
                           <m:r>
-                            <a:rPr lang="en-US" sz="2310" i="0">
+                            <a:rPr lang="en-US" sz="1890" i="0">
                               <a:latin typeface="Cambria Math"/>
                             </a:rPr>
                             <m:t>0</m:t>
@@ -3961,7 +3961,7 @@
                         </m:sub>
                         <m:sup>
                           <m:r>
-                            <a:rPr lang="en-US" sz="2310" i="0">
+                            <a:rPr lang="en-US" sz="1890" i="0">
                               <a:latin typeface="Cambria Math"/>
                             </a:rPr>
                             <m:t>1</m:t>
@@ -3974,7 +3974,7 @@
                             </m:fPr>
                             <m:num>
                               <m:r>
-                                <a:rPr lang="en-US" sz="2310" i="0">
+                                <a:rPr lang="en-US" sz="1890" i="0">
                                   <a:latin typeface="Cambria Math"/>
                                 </a:rPr>
                                 <m:t>1</m:t>
@@ -3982,7 +3982,7 @@
                             </m:num>
                             <m:den>
                               <m:r>
-                                <a:rPr lang="en-US" sz="2310" i="0">
+                                <a:rPr lang="en-US" sz="1890" i="0">
                                   <a:latin typeface="Cambria Math"/>
                                 </a:rPr>
                                 <m:t>2</m:t>
@@ -4000,7 +4000,7 @@
                         </m:dPr>
                         <m:e>
                           <m:r>
-                            <a:rPr lang="en-US" sz="2310" i="1">
+                            <a:rPr lang="en-US" sz="1890" i="1">
                               <a:latin typeface="Cambria Math"/>
                             </a:rPr>
                             <m:t>α</m:t>
@@ -4018,7 +4018,7 @@
                                   <m:sSup>
                                     <m:e>
                                       <m:r>
-                                        <a:rPr lang="en-US" sz="2310" i="1">
+                                        <a:rPr lang="en-US" sz="1890" i="1">
                                           <a:latin typeface="Cambria Math"/>
                                         </a:rPr>
                                         <m:t>v</m:t>
@@ -4029,7 +4029,7 @@
                                         <m:rPr>
                                           <m:sty m:val="p"/>
                                         </m:rPr>
-                                        <a:rPr lang="en-US" sz="2310" i="0">
+                                        <a:rPr lang="en-US" sz="1890" i="0">
                                           <a:latin typeface="Cambria Math"/>
                                         </a:rPr>
                                         <m:t>′</m:t>
@@ -4040,13 +4040,13 @@
                                     <m:rPr>
                                       <m:sty m:val="p"/>
                                     </m:rPr>
-                                    <a:rPr lang="en-US" sz="2310" i="0">
+                                    <a:rPr lang="en-US" sz="1890" i="0">
                                       <a:latin typeface="Cambria Math"/>
                                     </a:rPr>
                                     <m:t>(</m:t>
                                   </m:r>
                                   <m:r>
-                                    <a:rPr lang="en-US" sz="2310" i="1">
+                                    <a:rPr lang="en-US" sz="1890" i="1">
                                       <a:latin typeface="Cambria Math"/>
                                     </a:rPr>
                                     <m:t>s</m:t>
@@ -4055,7 +4055,7 @@
                                     <m:rPr>
                                       <m:sty m:val="p"/>
                                     </m:rPr>
-                                    <a:rPr lang="en-US" sz="2310" i="0">
+                                    <a:rPr lang="en-US" sz="1890" i="0">
                                       <a:latin typeface="Cambria Math"/>
                                     </a:rPr>
                                     <m:t>)</m:t>
@@ -4065,7 +4065,7 @@
                             </m:e>
                             <m:sup>
                               <m:r>
-                                <a:rPr lang="en-US" sz="2310" i="0">
+                                <a:rPr lang="en-US" sz="1890" i="0">
                                   <a:latin typeface="Cambria Math"/>
                                 </a:rPr>
                                 <m:t>2</m:t>
@@ -4076,13 +4076,13 @@
                             <m:rPr>
                               <m:sty m:val="p"/>
                             </m:rPr>
-                            <a:rPr lang="en-US" sz="2310" i="0">
+                            <a:rPr lang="en-US" sz="1890" i="0">
                               <a:latin typeface="Cambria Math"/>
                             </a:rPr>
                             <m:t>+</m:t>
                           </m:r>
                           <m:r>
-                            <a:rPr lang="en-US" sz="2310" i="1">
+                            <a:rPr lang="en-US" sz="1890" i="1">
                               <a:latin typeface="Cambria Math"/>
                             </a:rPr>
                             <m:t>β</m:t>
@@ -4100,7 +4100,7 @@
                                   <m:sSup>
                                     <m:e>
                                       <m:r>
-                                        <a:rPr lang="en-US" sz="2310" i="1">
+                                        <a:rPr lang="en-US" sz="1890" i="1">
                                           <a:latin typeface="Cambria Math"/>
                                         </a:rPr>
                                         <m:t>v</m:t>
@@ -4111,7 +4111,7 @@
                                         <m:rPr>
                                           <m:sty m:val="p"/>
                                         </m:rPr>
-                                        <a:rPr lang="en-US" sz="2310" i="0">
+                                        <a:rPr lang="en-US" sz="1890" i="0">
                                           <a:latin typeface="Cambria Math"/>
                                         </a:rPr>
                                         <m:t>′</m:t>
@@ -4120,7 +4120,7 @@
                                         <m:rPr>
                                           <m:sty m:val="p"/>
                                         </m:rPr>
-                                        <a:rPr lang="en-US" sz="2310" i="0">
+                                        <a:rPr lang="en-US" sz="1890" i="0">
                                           <a:latin typeface="Cambria Math"/>
                                         </a:rPr>
                                         <m:t>′</m:t>
@@ -4131,13 +4131,13 @@
                                     <m:rPr>
                                       <m:sty m:val="p"/>
                                     </m:rPr>
-                                    <a:rPr lang="en-US" sz="2310" i="0">
+                                    <a:rPr lang="en-US" sz="1890" i="0">
                                       <a:latin typeface="Cambria Math"/>
                                     </a:rPr>
                                     <m:t>(</m:t>
                                   </m:r>
                                   <m:r>
-                                    <a:rPr lang="en-US" sz="2310" i="1">
+                                    <a:rPr lang="en-US" sz="1890" i="1">
                                       <a:latin typeface="Cambria Math"/>
                                     </a:rPr>
                                     <m:t>s</m:t>
@@ -4146,7 +4146,7 @@
                                     <m:rPr>
                                       <m:sty m:val="p"/>
                                     </m:rPr>
-                                    <a:rPr lang="en-US" sz="2310" i="0">
+                                    <a:rPr lang="en-US" sz="1890" i="0">
                                       <a:latin typeface="Cambria Math"/>
                                     </a:rPr>
                                     <m:t>)</m:t>
@@ -4156,7 +4156,7 @@
                             </m:e>
                             <m:sup>
                               <m:r>
-                                <a:rPr lang="en-US" sz="2310" i="0">
+                                <a:rPr lang="en-US" sz="1890" i="0">
                                   <a:latin typeface="Cambria Math"/>
                                 </a:rPr>
                                 <m:t>2</m:t>
@@ -4169,7 +4169,7 @@
                         <m:rPr>
                           <m:sty m:val="p"/>
                         </m:rPr>
-                        <a:rPr lang="en-US" sz="2310" i="0">
+                        <a:rPr lang="en-US" sz="1890" i="0">
                           <a:latin typeface="Cambria Math"/>
                         </a:rPr>
                         <m:t>+</m:t>
@@ -4177,7 +4177,7 @@
                       <m:sSub>
                         <m:e>
                           <m:r>
-                            <a:rPr lang="en-US" sz="2310" i="1">
+                            <a:rPr lang="en-US" sz="1890" i="1">
                               <a:latin typeface="Cambria Math"/>
                             </a:rPr>
                             <m:t>E</m:t>
@@ -4189,7 +4189,7 @@
                               <m:nor/>
                               <m:sty m:val="p"/>
                             </m:rPr>
-                            <a:rPr lang="en-US" sz="2310" i="0">
+                            <a:rPr lang="en-US" sz="1890" i="0">
                               <a:latin typeface="Cambria Math"/>
                             </a:rPr>
                             <m:t>img</m:t>
@@ -4200,13 +4200,13 @@
                         <m:rPr>
                           <m:sty m:val="p"/>
                         </m:rPr>
-                        <a:rPr lang="en-US" sz="2310" i="0">
+                        <a:rPr lang="en-US" sz="1890" i="0">
                           <a:latin typeface="Cambria Math"/>
                         </a:rPr>
                         <m:t>(</m:t>
                       </m:r>
                       <m:r>
-                        <a:rPr lang="en-US" sz="2310" i="1">
+                        <a:rPr lang="en-US" sz="1890" i="1">
                           <a:latin typeface="Cambria Math"/>
                         </a:rPr>
                         <m:t>v</m:t>
@@ -4215,13 +4215,13 @@
                         <m:rPr>
                           <m:sty m:val="p"/>
                         </m:rPr>
-                        <a:rPr lang="en-US" sz="2310" i="0">
+                        <a:rPr lang="en-US" sz="1890" i="0">
                           <a:latin typeface="Cambria Math"/>
                         </a:rPr>
                         <m:t>(</m:t>
                       </m:r>
                       <m:r>
-                        <a:rPr lang="en-US" sz="2310" i="1">
+                        <a:rPr lang="en-US" sz="1890" i="1">
                           <a:latin typeface="Cambria Math"/>
                         </a:rPr>
                         <m:t>s</m:t>
@@ -4230,7 +4230,7 @@
                         <m:rPr>
                           <m:sty m:val="p"/>
                         </m:rPr>
-                        <a:rPr lang="en-US" sz="2310" i="0">
+                        <a:rPr lang="en-US" sz="1890" i="0">
                           <a:latin typeface="Cambria Math"/>
                         </a:rPr>
                         <m:t>)</m:t>
@@ -4239,25 +4239,25 @@
                         <m:rPr>
                           <m:sty m:val="p"/>
                         </m:rPr>
-                        <a:rPr lang="en-US" sz="2310" i="0">
+                        <a:rPr lang="en-US" sz="1890" i="0">
                           <a:latin typeface="Cambria Math"/>
                         </a:rPr>
                         <m:t>)</m:t>
                       </m:r>
                       <m:r>
-                        <a:rPr lang="en-US" sz="2310" i="0">
+                        <a:rPr lang="en-US" sz="1890" i="0">
                           <a:latin typeface="Cambria Math"/>
                         </a:rPr>
                         <m:t> </m:t>
                       </m:r>
                       <m:r>
-                        <a:rPr lang="en-US" sz="2310" i="1">
+                        <a:rPr lang="en-US" sz="1890" i="1">
                           <a:latin typeface="Cambria Math"/>
                         </a:rPr>
                         <m:t>d</m:t>
                       </m:r>
                       <m:r>
-                        <a:rPr lang="en-US" sz="2310" i="1">
+                        <a:rPr lang="en-US" sz="1890" i="1">
                           <a:latin typeface="Cambria Math"/>
                         </a:rPr>
                         <m:t>s</m:t>
@@ -4278,8 +4278,8 @@
             </p:nvSpPr>
             <p:spPr>
               <a:xfrm>
-                <a:off x="5420435" y="2908300"/>
-                <a:ext cx="6222620" cy="960120"/>
+                <a:off x="4562143" y="2995584"/>
+                <a:ext cx="7080912" cy="785553"/>
               </a:xfrm>
               <a:prstGeom prst="rect">
                 <a:avLst/>
@@ -4294,7 +4294,7 @@
               <a:p>
                 <a:pPr algn="ctr"/>
                 <a:r>
-                  <a:rPr sz="2310" i="1"/>
+                  <a:rPr sz="1890" i="1"/>
                   <a:t>E = ∫₀¹ (1)/(2)(α lVert v^prime(s) rVert² + β lVert v^(primeprime)(s) rVert²) + E_(img)(v(s)) ds</a:t>
                 </a:r>
               </a:p>
@@ -4310,8 +4310,8 @@
         </p:nvSpPr>
         <p:spPr>
           <a:xfrm>
-            <a:off x="5420435" y="4097020"/>
-            <a:ext cx="6222620" cy="1191768"/>
+            <a:off x="4562143" y="4009736"/>
+            <a:ext cx="7080912" cy="1191768"/>
           </a:xfrm>
           <a:prstGeom prst="rect">
             <a:avLst/>
@@ -8075,8 +8075,8 @@
           <p:nvPr/>
         </p:nvGraphicFramePr>
         <p:xfrm>
-          <a:off x="548640" y="1408397"/>
-          <a:ext cx="11094415" cy="2233805"/>
+          <a:off x="548640" y="1405794"/>
+          <a:ext cx="11094415" cy="2239010"/>
         </p:xfrm>
         <a:graphic>
           <a:graphicData uri="http://schemas.openxmlformats.org/drawingml/2006/table">
@@ -8090,7 +8090,7 @@
                 <a:gridCol w="5088710"/>
                 <a:gridCol w="1459624"/>
               </a:tblGrid>
-              <a:tr h="446761">
+              <a:tr h="447802">
                 <a:tc>
                   <a:txBody>
                     <a:bodyPr/>
@@ -8244,7 +8244,7 @@
                   </a:tcPr>
                 </a:tc>
               </a:tr>
-              <a:tr h="446761">
+              <a:tr h="447802">
                 <a:tc>
                   <a:txBody>
                     <a:bodyPr/>
@@ -8374,7 +8374,7 @@
                   </a:tcPr>
                 </a:tc>
               </a:tr>
-              <a:tr h="446761">
+              <a:tr h="447802">
                 <a:tc>
                   <a:txBody>
                     <a:bodyPr/>
@@ -8504,7 +8504,7 @@
                   </a:tcPr>
                 </a:tc>
               </a:tr>
-              <a:tr h="446761">
+              <a:tr h="447802">
                 <a:tc>
                   <a:txBody>
                     <a:bodyPr/>
@@ -8634,7 +8634,7 @@
                   </a:tcPr>
                 </a:tc>
               </a:tr>
-              <a:tr h="446761">
+              <a:tr h="447802">
                 <a:tc>
                   <a:txBody>
                     <a:bodyPr/>
@@ -8788,7 +8788,7 @@
         </p:nvSpPr>
         <p:spPr>
           <a:xfrm>
-            <a:off x="1658081" y="3870800"/>
+            <a:off x="1658081" y="3873404"/>
             <a:ext cx="8875532" cy="2218883"/>
           </a:xfrm>
           <a:prstGeom prst="rect">
@@ -8961,8 +8961,8 @@
         </p:nvSpPr>
         <p:spPr>
           <a:xfrm>
-            <a:off x="6815160" y="2149856"/>
-            <a:ext cx="4827895" cy="3198368"/>
+            <a:off x="6815160" y="2317496"/>
+            <a:ext cx="4827895" cy="2863088"/>
           </a:xfrm>
           <a:prstGeom prst="rect">
             <a:avLst/>
@@ -11304,7 +11304,13 @@
           <p:nvPr/>
         </p:nvPicPr>
         <p:blipFill>
-          <a:blip r:embed="rId2"/>
+          <a:blip r:embed="rId2">
+            <a:extLst>
+              <a:ext uri="{96DAC541-7B7A-43D3-8B79-37D633B846F1}">
+                <asvg:svgBlip xmlns:asvg="http://schemas.microsoft.com/office/drawing/2016/SVG/main" r:embed="rId3"/>
+              </a:ext>
+            </a:extLst>
+          </a:blip>
           <a:stretch>
             <a:fillRect/>
           </a:stretch>
@@ -11327,8 +11333,8 @@
         </p:nvSpPr>
         <p:spPr>
           <a:xfrm>
-            <a:off x="548640" y="5532120"/>
-            <a:ext cx="11094415" cy="365760"/>
+            <a:off x="548640" y="5522976"/>
+            <a:ext cx="11094415" cy="329184"/>
           </a:xfrm>
           <a:prstGeom prst="rect">
             <a:avLst/>
@@ -12704,7 +12710,13 @@
           <p:nvPr/>
         </p:nvPicPr>
         <p:blipFill>
-          <a:blip r:embed="rId2"/>
+          <a:blip r:embed="rId2">
+            <a:extLst>
+              <a:ext uri="{96DAC541-7B7A-43D3-8B79-37D633B846F1}">
+                <asvg:svgBlip xmlns:asvg="http://schemas.microsoft.com/office/drawing/2016/SVG/main" r:embed="rId3"/>
+              </a:ext>
+            </a:extLst>
+          </a:blip>
           <a:stretch>
             <a:fillRect/>
           </a:stretch>
@@ -12727,8 +12739,8 @@
         </p:nvSpPr>
         <p:spPr>
           <a:xfrm>
-            <a:off x="6815160" y="2516632"/>
-            <a:ext cx="4827895" cy="1811528"/>
+            <a:off x="6815160" y="2646172"/>
+            <a:ext cx="4827895" cy="1552448"/>
           </a:xfrm>
           <a:prstGeom prst="rect">
             <a:avLst/>
@@ -12977,7 +12989,7 @@
         </p:nvSpPr>
         <p:spPr>
           <a:xfrm>
-            <a:off x="6815160" y="4556760"/>
+            <a:off x="6815160" y="4427220"/>
             <a:ext cx="4827895" cy="424688"/>
           </a:xfrm>
           <a:prstGeom prst="rect">
@@ -13259,7 +13271,13 @@
           <p:nvPr/>
         </p:nvPicPr>
         <p:blipFill>
-          <a:blip r:embed="rId2"/>
+          <a:blip r:embed="rId2">
+            <a:extLst>
+              <a:ext uri="{96DAC541-7B7A-43D3-8B79-37D633B846F1}">
+                <asvg:svgBlip xmlns:asvg="http://schemas.microsoft.com/office/drawing/2016/SVG/main" r:embed="rId3"/>
+              </a:ext>
+            </a:extLst>
+          </a:blip>
           <a:stretch>
             <a:fillRect/>
           </a:stretch>
@@ -13282,8 +13300,8 @@
         </p:nvSpPr>
         <p:spPr>
           <a:xfrm>
-            <a:off x="548640" y="5532120"/>
-            <a:ext cx="11094415" cy="365760"/>
+            <a:off x="548640" y="5522976"/>
+            <a:ext cx="11094415" cy="329184"/>
           </a:xfrm>
           <a:prstGeom prst="rect">
             <a:avLst/>
@@ -13365,7 +13383,13 @@
           <p:nvPr/>
         </p:nvPicPr>
         <p:blipFill>
-          <a:blip r:embed="rId2"/>
+          <a:blip r:embed="rId2">
+            <a:extLst>
+              <a:ext uri="{96DAC541-7B7A-43D3-8B79-37D633B846F1}">
+                <asvg:svgBlip xmlns:asvg="http://schemas.microsoft.com/office/drawing/2016/SVG/main" r:embed="rId3"/>
+              </a:ext>
+            </a:extLst>
+          </a:blip>
           <a:stretch>
             <a:fillRect/>
           </a:stretch>
@@ -13388,8 +13412,8 @@
         </p:nvSpPr>
         <p:spPr>
           <a:xfrm>
-            <a:off x="548640" y="5532120"/>
-            <a:ext cx="11094415" cy="365760"/>
+            <a:off x="548640" y="5522976"/>
+            <a:ext cx="11094415" cy="329184"/>
           </a:xfrm>
           <a:prstGeom prst="rect">
             <a:avLst/>
@@ -13514,8 +13538,8 @@
           <p:nvPr/>
         </p:nvGraphicFramePr>
         <p:xfrm>
-          <a:off x="548640" y="2408758"/>
-          <a:ext cx="11094415" cy="2680566"/>
+          <a:off x="548640" y="2274570"/>
+          <a:ext cx="11094415" cy="2686812"/>
         </p:xfrm>
         <a:graphic>
           <a:graphicData uri="http://schemas.openxmlformats.org/drawingml/2006/table">
@@ -13524,11 +13548,11 @@
                 <a:tableStyleId>{2D5ABB26-0587-4C30-8999-92F81FD0307C}</a:tableStyleId>
               </a:tblPr>
               <a:tblGrid>
-                <a:gridCol w="1935335"/>
-                <a:gridCol w="5149859"/>
-                <a:gridCol w="4009221"/>
+                <a:gridCol w="2371344"/>
+                <a:gridCol w="4848223"/>
+                <a:gridCol w="3874848"/>
               </a:tblGrid>
-              <a:tr h="446761">
+              <a:tr h="447802">
                 <a:tc>
                   <a:txBody>
                     <a:bodyPr/>
@@ -13632,7 +13656,7 @@
                   </a:tcPr>
                 </a:tc>
               </a:tr>
-              <a:tr h="446761">
+              <a:tr h="447802">
                 <a:tc>
                   <a:txBody>
                     <a:bodyPr/>
@@ -13730,7 +13754,7 @@
                   </a:tcPr>
                 </a:tc>
               </a:tr>
-              <a:tr h="446761">
+              <a:tr h="447802">
                 <a:tc>
                   <a:txBody>
                     <a:bodyPr/>
@@ -13843,7 +13867,7 @@
                   </a:tcPr>
                 </a:tc>
               </a:tr>
-              <a:tr h="446761">
+              <a:tr h="447802">
                 <a:tc>
                   <a:txBody>
                     <a:bodyPr/>
@@ -13941,7 +13965,7 @@
                   </a:tcPr>
                 </a:tc>
               </a:tr>
-              <a:tr h="446761">
+              <a:tr h="447802">
                 <a:tc>
                   <a:txBody>
                     <a:bodyPr/>
@@ -14054,7 +14078,7 @@
                   </a:tcPr>
                 </a:tc>
               </a:tr>
-              <a:tr h="446761">
+              <a:tr h="447802">
                 <a:tc>
                   <a:txBody>
                     <a:bodyPr/>
@@ -14207,7 +14231,7 @@
         </p:nvSpPr>
         <p:spPr>
           <a:xfrm>
-            <a:off x="826000" y="1316867"/>
+            <a:off x="826000" y="1652147"/>
             <a:ext cx="10539694" cy="2107939"/>
           </a:xfrm>
           <a:prstGeom prst="rect">
@@ -14272,8 +14296,8 @@
         </p:nvSpPr>
         <p:spPr>
           <a:xfrm>
-            <a:off x="548640" y="3653405"/>
-            <a:ext cx="11094415" cy="2527808"/>
+            <a:off x="548640" y="3988685"/>
+            <a:ext cx="11094415" cy="1857248"/>
           </a:xfrm>
           <a:prstGeom prst="rect">
             <a:avLst/>
@@ -16097,10 +16121,10 @@
         </p:nvGrpSpPr>
         <p:grpSpPr>
           <a:xfrm>
-            <a:off x="8188757" y="4750778"/>
-            <a:ext cx="3454298" cy="1407706"/>
-            <a:chOff x="8188757" y="4750778"/>
-            <a:chExt cx="3454298" cy="1407706"/>
+            <a:off x="8188757" y="4599902"/>
+            <a:ext cx="3454298" cy="1709458"/>
+            <a:chOff x="8188757" y="4599902"/>
+            <a:chExt cx="3454298" cy="1709458"/>
           </a:xfrm>
         </p:grpSpPr>
         <p:sp>
@@ -16111,12 +16135,12 @@
           </p:nvSpPr>
           <p:spPr>
             <a:xfrm>
-              <a:off x="8188757" y="4750778"/>
-              <a:ext cx="3454298" cy="1407706"/>
+              <a:off x="8188757" y="4599902"/>
+              <a:ext cx="3454298" cy="1709458"/>
             </a:xfrm>
             <a:prstGeom prst="roundRect">
               <a:avLst>
-                <a:gd name="adj" fmla="val 5846"/>
+                <a:gd name="adj" fmla="val 4814"/>
               </a:avLst>
             </a:prstGeom>
             <a:solidFill>
@@ -16372,7 +16396,7 @@
           </p:nvSpPr>
           <p:spPr>
             <a:xfrm>
-              <a:off x="8188757" y="4750778"/>
+              <a:off x="8188757" y="4599902"/>
               <a:ext cx="3454298" cy="483146"/>
             </a:xfrm>
             <a:prstGeom prst="round2SameRect">
@@ -17737,7 +17761,13 @@
           <p:nvPr/>
         </p:nvPicPr>
         <p:blipFill>
-          <a:blip r:embed="rId2"/>
+          <a:blip r:embed="rId2">
+            <a:extLst>
+              <a:ext uri="{96DAC541-7B7A-43D3-8B79-37D633B846F1}">
+                <asvg:svgBlip xmlns:asvg="http://schemas.microsoft.com/office/drawing/2016/SVG/main" r:embed="rId3"/>
+              </a:ext>
+            </a:extLst>
+          </a:blip>
           <a:stretch>
             <a:fillRect/>
           </a:stretch>
@@ -17760,8 +17790,8 @@
         </p:nvSpPr>
         <p:spPr>
           <a:xfrm>
-            <a:off x="548640" y="5532120"/>
-            <a:ext cx="5900760" cy="365760"/>
+            <a:off x="548640" y="5522976"/>
+            <a:ext cx="5900760" cy="329184"/>
           </a:xfrm>
           <a:prstGeom prst="rect">
             <a:avLst/>
